--- a/fixtures/sample-autofit.pptx
+++ b/fixtures/sample-autofit.pptx
@@ -10,6 +10,7 @@
     <p:sldId id="258" r:id="rId4"/>
     <p:sldId id="259" r:id="rId5"/>
     <p:sldId id="260" r:id="rId6"/>
+    <p:sldId id="261" r:id="rId7"/>
   </p:sldIdLst>
   <p:sldSz cx="12192000" cy="6858000"/>
   <p:notesSz cx="6858000" cy="9144000"/>
@@ -662,6 +663,139 @@
       <p:sp>
         <p:nvSpPr>
           <p:cNvPr id="115" name="sp"/>
+          <p:cNvSpPr/>
+          <p:nvPr/>
+        </p:nvSpPr>
+        <p:spPr>
+          <a:xfrm>
+            <a:off x="4953000" y="1714500"/>
+            <a:ext cx="3810000" cy="1333500"/>
+          </a:xfrm>
+          <a:prstGeom prst="rect">
+            <a:avLst/>
+          </a:prstGeom>
+          <a:noFill/>
+        </p:spPr>
+        <p:txBody>
+          <a:bodyPr anchor="ctr"/>
+          <a:lstStyle/>
+          <a:p>
+            <a:pPr algn="ctr"/>
+            <a:r>
+              <a:rPr sz="900">
+                <a:solidFill>
+                  <a:srgbClr val="606060"/>
+                </a:solidFill>
+              </a:rPr>
+              <a:t>左侧框 420×140，标称 20pt</a:t>
+            </a:r>
+          </a:p>
+        </p:txBody>
+      </p:sp>
+    </p:spTree>
+  </p:cSld>
+  <p:clrMapOvr>
+    <a:masterClrMapping/>
+  </p:clrMapOvr>
+</p:sld>
+</file>
+
+<file path=ppt/slides/slide6.xml><?xml version="1.0" encoding="utf-8"?>
+<p:sld xmlns:a="http://schemas.openxmlformats.org/drawingml/2006/main" xmlns:r="http://schemas.openxmlformats.org/officeDocument/2006/relationships" xmlns:p="http://schemas.openxmlformats.org/presentationml/2006/main">
+  <p:cSld>
+    <p:spTree>
+      <p:nvGrpSpPr>
+        <p:cNvPr id="1" name=""/>
+        <p:cNvGrpSpPr/>
+        <p:nvPr/>
+      </p:nvGrpSpPr>
+      <p:grpSpPr>
+        <a:xfrm>
+          <a:off x="0" y="0"/>
+          <a:ext cx="0" cy="0"/>
+          <a:chOff x="0" y="0"/>
+          <a:chExt cx="0" cy="0"/>
+        </a:xfrm>
+      </p:grpSpPr>
+      <p:sp>
+        <p:nvSpPr>
+          <p:cNvPr id="116" name="sp"/>
+          <p:cNvSpPr/>
+          <p:nvPr/>
+        </p:nvSpPr>
+        <p:spPr>
+          <a:xfrm>
+            <a:off x="381000" y="571500"/>
+            <a:ext cx="11430000" cy="571500"/>
+          </a:xfrm>
+          <a:prstGeom prst="rect">
+            <a:avLst/>
+          </a:prstGeom>
+          <a:noFill/>
+        </p:spPr>
+        <p:txBody>
+          <a:bodyPr anchor="ctr"/>
+          <a:lstStyle/>
+          <a:p>
+            <a:r>
+              <a:rPr sz="2400" b="1">
+                <a:solidFill>
+                  <a:schemeClr val="tx2"/>
+                </a:solidFill>
+              </a:rPr>
+              <a:t>行距 150% (spcPct) 与 24pt (spcPts) 对照</a:t>
+            </a:r>
+          </a:p>
+        </p:txBody>
+      </p:sp>
+      <p:sp>
+        <p:nvSpPr>
+          <p:cNvPr id="117" name="target"/>
+          <p:cNvSpPr/>
+          <p:nvPr/>
+        </p:nvSpPr>
+        <p:spPr>
+          <a:xfrm>
+            <a:off x="571500" y="1714500"/>
+            <a:ext cx="4000500" cy="1333500"/>
+          </a:xfrm>
+          <a:prstGeom prst="rect">
+            <a:avLst/>
+          </a:prstGeom>
+          <a:solidFill>
+            <a:schemeClr val="accent1"/>
+          </a:solidFill>
+        </p:spPr>
+        <p:txBody>
+          <a:bodyPr/>
+          <a:lstStyle/>
+          <a:p>
+            <a:pPr>
+              <a:lnSpc>
+                <a:spcPct val="150000"/>
+              </a:lnSpc>
+            </a:pPr>
+            <a:r>
+              <a:rPr sz="1400"/>
+              <a:t>百分比行距 150%：这一段有三行，用来验证行高的基准是字体行高而不是字号。</a:t>
+            </a:r>
+          </a:p>
+          <a:p>
+            <a:pPr>
+              <a:lnSpc>
+                <a:spcPts val="2400"/>
+              </a:lnSpc>
+            </a:pPr>
+            <a:r>
+              <a:rPr sz="1400"/>
+              <a:t>绝对行距 24pt：同样三行，换算方式与百分比行距不同。</a:t>
+            </a:r>
+          </a:p>
+        </p:txBody>
+      </p:sp>
+      <p:sp>
+        <p:nvSpPr>
+          <p:cNvPr id="118" name="sp"/>
           <p:cNvSpPr/>
           <p:nvPr/>
         </p:nvSpPr>
